--- a/courses/learn_partitioning/module02-01-kl-partition/slides.pptx
+++ b/courses/learn_partitioning/module02-01-kl-partition/slides.pptx
@@ -16,6 +16,9 @@
     <p:sldId id="264" r:id="rId16"/>
     <p:sldId id="265" r:id="rId17"/>
     <p:sldId id="266" r:id="rId18"/>
+    <p:sldId id="267" r:id="rId19"/>
+    <p:sldId id="268" r:id="rId20"/>
+    <p:sldId id="269" r:id="rId21"/>
   </p:sldIdLst>
   <p:sldSz cx="12191695" cy="6858000" type="screen4x3"/>
   <p:notesSz cx="6858000" cy="9144000"/>
@@ -582,7 +585,7 @@
           <a:lstStyle/>
           <a:p>
             <a:r>
-              <a:t>Common traps: optimizing cut while ignoring balance; reporting pairwise cut when the instance is a hypergraph; flipping locked terminals; and stopping before rollback to the best KL or FM prefix. For multilevel flows, verify coarsening before you blame the refiner.</a:t>
+              <a:t>In the browser lab track, open the **kl-partition** lab from the tools shelf. Load the starter graph, run the algorithm once, and read cutsize and balance in the metrics panel. Work the challenges that lock the goldens, then come back to implement the same loop yourself.</a:t>
             </a:r>
           </a:p>
         </p:txBody>
@@ -652,6 +655,146 @@
           <a:lstStyle/>
           <a:p>
             <a:r>
+              <a:t>In the implement track, open this module's EXAMPLES.md Pseudocode section and the course common solvers. Parse the tiny graph, run the algorithm with a deterministic seed, and print the assignment plus cutsize and balance. Match the browser goldens before you claim the checklist.</a:t>
+            </a:r>
+          </a:p>
+        </p:txBody>
+      </p:sp>
+      <p:sp>
+        <p:nvSpPr>
+          <p:cNvPr id="4" name="Slide Number Placeholder 3"/>
+          <p:cNvSpPr>
+            <a:spLocks noGrp="1"/>
+          </p:cNvSpPr>
+          <p:nvPr>
+            <p:ph type="sldNum" idx="5" sz="quarter"/>
+          </p:nvPr>
+        </p:nvSpPr>
+        <p:spPr/>
+      </p:sp>
+    </p:spTree>
+  </p:cSld>
+  <p:clrMapOvr>
+    <a:masterClrMapping/>
+  </p:clrMapOvr>
+</p:notes>
+</file>
+
+<file path=ppt/notesSlides/notesSlide12.xml><?xml version="1.0" encoding="utf-8"?>
+<p:notes xmlns:a="http://schemas.openxmlformats.org/drawingml/2006/main" xmlns:p="http://schemas.openxmlformats.org/presentationml/2006/main" xmlns:r="http://schemas.openxmlformats.org/officeDocument/2006/relationships">
+  <p:cSld>
+    <p:spTree>
+      <p:nvGrpSpPr>
+        <p:cNvPr id="1" name=""/>
+        <p:cNvGrpSpPr/>
+        <p:nvPr/>
+      </p:nvGrpSpPr>
+      <p:grpSpPr>
+        <a:xfrm>
+          <a:off x="0" y="0"/>
+          <a:ext cx="0" cy="0"/>
+          <a:chOff x="0" y="0"/>
+          <a:chExt cx="0" cy="0"/>
+        </a:xfrm>
+      </p:grpSpPr>
+      <p:sp>
+        <p:nvSpPr>
+          <p:cNvPr id="2" name="Slide Image Placeholder 1"/>
+          <p:cNvSpPr>
+            <a:spLocks noGrp="1"/>
+          </p:cNvSpPr>
+          <p:nvPr>
+            <p:ph type="sldImg" idx="2"/>
+          </p:nvPr>
+        </p:nvSpPr>
+        <p:spPr/>
+      </p:sp>
+      <p:sp>
+        <p:nvSpPr>
+          <p:cNvPr id="3" name="Notes Placeholder 2"/>
+          <p:cNvSpPr>
+            <a:spLocks noGrp="1"/>
+          </p:cNvSpPr>
+          <p:nvPr>
+            <p:ph type="body" idx="3" sz="quarter"/>
+          </p:nvPr>
+        </p:nvSpPr>
+        <p:spPr/>
+        <p:txBody>
+          <a:bodyPr/>
+          <a:lstStyle/>
+          <a:p>
+            <a:r>
+              <a:t>Common traps: optimizing cut while ignoring balance; reporting pairwise cut when the instance is a hypergraph; flipping locked terminals; and stopping before rollback to the best KL or FM prefix. For multilevel flows, verify coarsening before you blame the refiner.</a:t>
+            </a:r>
+          </a:p>
+        </p:txBody>
+      </p:sp>
+      <p:sp>
+        <p:nvSpPr>
+          <p:cNvPr id="4" name="Slide Number Placeholder 3"/>
+          <p:cNvSpPr>
+            <a:spLocks noGrp="1"/>
+          </p:cNvSpPr>
+          <p:nvPr>
+            <p:ph type="sldNum" idx="5" sz="quarter"/>
+          </p:nvPr>
+        </p:nvSpPr>
+        <p:spPr/>
+      </p:sp>
+    </p:spTree>
+  </p:cSld>
+  <p:clrMapOvr>
+    <a:masterClrMapping/>
+  </p:clrMapOvr>
+</p:notes>
+</file>
+
+<file path=ppt/notesSlides/notesSlide13.xml><?xml version="1.0" encoding="utf-8"?>
+<p:notes xmlns:a="http://schemas.openxmlformats.org/drawingml/2006/main" xmlns:p="http://schemas.openxmlformats.org/presentationml/2006/main" xmlns:r="http://schemas.openxmlformats.org/officeDocument/2006/relationships">
+  <p:cSld>
+    <p:spTree>
+      <p:nvGrpSpPr>
+        <p:cNvPr id="1" name=""/>
+        <p:cNvGrpSpPr/>
+        <p:nvPr/>
+      </p:nvGrpSpPr>
+      <p:grpSpPr>
+        <a:xfrm>
+          <a:off x="0" y="0"/>
+          <a:ext cx="0" cy="0"/>
+          <a:chOff x="0" y="0"/>
+          <a:chExt cx="0" cy="0"/>
+        </a:xfrm>
+      </p:grpSpPr>
+      <p:sp>
+        <p:nvSpPr>
+          <p:cNvPr id="2" name="Slide Image Placeholder 1"/>
+          <p:cNvSpPr>
+            <a:spLocks noGrp="1"/>
+          </p:cNvSpPr>
+          <p:nvPr>
+            <p:ph type="sldImg" idx="2"/>
+          </p:nvPr>
+        </p:nvSpPr>
+        <p:spPr/>
+      </p:sp>
+      <p:sp>
+        <p:nvSpPr>
+          <p:cNvPr id="3" name="Notes Placeholder 2"/>
+          <p:cNvSpPr>
+            <a:spLocks noGrp="1"/>
+          </p:cNvSpPr>
+          <p:nvPr>
+            <p:ph type="body" idx="3" sz="quarter"/>
+          </p:nvPr>
+        </p:nvSpPr>
+        <p:spPr/>
+        <p:txBody>
+          <a:bodyPr/>
+          <a:lstStyle/>
+          <a:p>
+            <a:r>
               <a:t>Complete the checklist for at least one track—preferably both. Implement until your metrics match the starter goldens. When you’re ready, take the short quiz, then continue to the next module.</a:t>
             </a:r>
           </a:p>
@@ -725,12 +868,6 @@
               <a:t>Score each unlocked pair by swap gain, lock pairs as you go, then keep only the prefix with best cumulative gain. Here the winning prefix is one swap: A with D, gain nine. Pass one then finds nothing and KL stops at a local optimum for swap moves.</a:t>
             </a:r>
           </a:p>
-          <a:p/>
-          <a:p>
-            <a:r>
-              <a:t>&lt;!-- algorithm-walkthrough --&gt;</a:t>
-            </a:r>
-          </a:p>
         </p:txBody>
       </p:sp>
       <p:sp>
@@ -798,7 +935,13 @@
           <a:lstStyle/>
           <a:p>
             <a:r>
-              <a:t>Start from a terrible bipartition AE|BCD. Both heavy edges A–B and D–E are cut, so cutsize is 12. KL will search improving swaps.</a:t>
+              <a:t>KL pseudocode builds a locked swap sequence each pass, then rolls back to the best positive prefix. Pair gain uses D-values minus twice the edge between the pair.</a:t>
+            </a:r>
+          </a:p>
+          <a:p/>
+          <a:p>
+            <a:r>
+              <a:t>Open this module's examples file and find the Pseudocode section. That written sketch is what you implement on the implement track and what the browser challenges measure.</a:t>
             </a:r>
           </a:p>
         </p:txBody>
@@ -868,7 +1011,7 @@
           <a:lstStyle/>
           <a:p>
             <a:r>
-              <a:t>KL considers swapping one vertex from each side. Gain estimates how much the cut shrinks. The best unlocked pair here is A↔D with gain 9.</a:t>
+              <a:t>From the cutsize-twelve bad seed the winning prefix is one swap, A with D. The sketch lands on ABC versus DE at cut three, then the next pass stops.</a:t>
             </a:r>
           </a:p>
         </p:txBody>
@@ -938,7 +1081,7 @@
           <a:lstStyle/>
           <a:p>
             <a:r>
-              <a:t>Pass 0 builds a sequence of candidate swaps, then keeps the prefix with best cumulative gain. Here best_k=1: perform A↔D once.</a:t>
+              <a:t>Start from a terrible bipartition AE|BCD. Both heavy edges A–B and D–E are cut, so cutsize is 12. KL will search improving swaps.</a:t>
             </a:r>
           </a:p>
         </p:txBody>
@@ -1008,7 +1151,7 @@
           <a:lstStyle/>
           <a:p>
             <a:r>
-              <a:t>After the swap, A joins B,C and D joins E. Heavy edges are internal; only the weak C–D/C–E bridge remains cut.</a:t>
+              <a:t>KL considers swapping one vertex from each side. Gain estimates how much the cut shrinks. The best unlocked pair here is A↔D with gain 9.</a:t>
             </a:r>
           </a:p>
         </p:txBody>
@@ -1078,13 +1221,7 @@
           <a:lstStyle/>
           <a:p>
             <a:r>
-              <a:t>Pass 1 reports improved=false. KL stops when a full pass cannot improve — local optimum for swap moves from this seed.</a:t>
-            </a:r>
-          </a:p>
-          <a:p/>
-          <a:p>
-            <a:r>
-              <a:t>&lt;!-- /algorithm-walkthrough --&gt;</a:t>
+              <a:t>Pass 0 builds a sequence of candidate swaps, then keeps the prefix with best cumulative gain. Here best_k=1: perform A↔D once.</a:t>
             </a:r>
           </a:p>
         </p:txBody>
@@ -1154,7 +1291,7 @@
           <a:lstStyle/>
           <a:p>
             <a:r>
-              <a:t>In the browser lab track, open the **kl-partition** lab from the tools shelf. Load the starter graph, run the algorithm once, and read cutsize and balance in the metrics panel. Work the challenges that lock the goldens, then come back to implement the same loop yourself.</a:t>
+              <a:t>After the swap, A joins B,C and D joins E. Heavy edges are internal; only the weak C–D/C–E bridge remains cut.</a:t>
             </a:r>
           </a:p>
         </p:txBody>
@@ -1224,7 +1361,7 @@
           <a:lstStyle/>
           <a:p>
             <a:r>
-              <a:t>In the implement track, open this module’s examples and the course `common/` solvers. Parse the tiny graph, run the algorithm with a deterministic seed, and print the assignment plus cutsize and balance. Match the browser goldens before you claim the checklist.</a:t>
+              <a:t>Pass 1 reports improved=false. KL stops when a full pass cannot improve — local optimum for swap moves from this seed.</a:t>
             </a:r>
           </a:p>
         </p:txBody>
@@ -4382,21 +4519,45 @@
                 </a:solidFill>
                 <a:latin typeface="Calibri"/>
               </a:rPr>
-              <a:t>Pitfalls</a:t>
-            </a:r>
-          </a:p>
-        </p:txBody>
-      </p:sp>
-      <p:sp>
-        <p:nvSpPr>
-          <p:cNvPr id="3" name="TextBox 2"/>
+              <a:t>Next pass finds nothing</a:t>
+            </a:r>
+          </a:p>
+        </p:txBody>
+      </p:sp>
+      <p:pic>
+        <p:nvPicPr>
+          <p:cNvPr id="3" name="Picture 2" descr="05-pass1-stop.png"/>
+          <p:cNvPicPr>
+            <a:picLocks noChangeAspect="1"/>
+          </p:cNvPicPr>
+          <p:nvPr/>
+        </p:nvPicPr>
+        <p:blipFill>
+          <a:blip r:embed="rId2"/>
+          <a:stretch>
+            <a:fillRect/>
+          </a:stretch>
+        </p:blipFill>
+        <p:spPr>
+          <a:xfrm>
+            <a:off x="548640" y="1143000"/>
+            <a:ext cx="9404113" cy="4572000"/>
+          </a:xfrm>
+          <a:prstGeom prst="rect">
+            <a:avLst/>
+          </a:prstGeom>
+        </p:spPr>
+      </p:pic>
+      <p:sp>
+        <p:nvSpPr>
+          <p:cNvPr id="4" name="TextBox 3"/>
           <p:cNvSpPr txBox="1"/>
           <p:nvPr/>
         </p:nvSpPr>
         <p:spPr>
           <a:xfrm>
-            <a:off x="548640" y="1234440"/>
-            <a:ext cx="11064240" cy="4937760"/>
+            <a:off x="548640" y="5897880"/>
+            <a:ext cx="11064240" cy="411480"/>
           </a:xfrm>
           <a:prstGeom prst="rect">
             <a:avLst/>
@@ -4409,54 +4570,26 @@
           </a:bodyPr>
           <a:lstStyle/>
           <a:p>
-            <a:pPr lvl="0" marL="457200" indent="-228600">
-              <a:buFont typeface="Calibri"/>
-              <a:spcAft>
-                <a:spcPts val="1000"/>
-              </a:spcAft>
-              <a:buSzPct val="100000"/>
-              <a:buChar char="•"/>
+            <a:pPr>
               <a:lnSpc>
                 <a:spcPts val="2200"/>
               </a:lnSpc>
             </a:pPr>
             <a:r>
-              <a:rPr sz="2000" b="0">
+              <a:rPr sz="1200" b="0">
                 <a:solidFill>
                   <a:srgbClr val="333333"/>
                 </a:solidFill>
                 <a:latin typeface="Calibri"/>
               </a:rPr>
-              <a:t>Common traps</a:t>
-            </a:r>
-          </a:p>
-          <a:p>
-            <a:pPr lvl="0" marL="457200" indent="-228600">
-              <a:buFont typeface="Calibri"/>
-              <a:spcAft>
-                <a:spcPts val="1000"/>
-              </a:spcAft>
-              <a:buSzPct val="100000"/>
-              <a:buChar char="•"/>
-              <a:lnSpc>
-                <a:spcPts val="2200"/>
-              </a:lnSpc>
-            </a:pPr>
-            <a:r>
-              <a:rPr sz="2000" b="0">
-                <a:solidFill>
-                  <a:srgbClr val="333333"/>
-                </a:solidFill>
-                <a:latin typeface="Calibri"/>
-              </a:rPr>
-              <a:t>For multilevel flows, verify coarsening before you blame the refiner</a:t>
-            </a:r>
-          </a:p>
-        </p:txBody>
-      </p:sp>
-      <p:sp>
-        <p:nvSpPr>
-          <p:cNvPr id="4" name="TextBox 3"/>
+              <a:t>Next pass finds nothing</a:t>
+            </a:r>
+          </a:p>
+        </p:txBody>
+      </p:sp>
+      <p:sp>
+        <p:nvSpPr>
+          <p:cNvPr id="5" name="TextBox 4"/>
           <p:cNvSpPr txBox="1"/>
           <p:nvPr/>
         </p:nvSpPr>
@@ -4545,6 +4678,557 @@
                 </a:solidFill>
                 <a:latin typeface="Calibri"/>
               </a:rPr>
+              <a:t>Browser lab track</a:t>
+            </a:r>
+          </a:p>
+        </p:txBody>
+      </p:sp>
+      <p:sp>
+        <p:nvSpPr>
+          <p:cNvPr id="3" name="TextBox 2"/>
+          <p:cNvSpPr txBox="1"/>
+          <p:nvPr/>
+        </p:nvSpPr>
+        <p:spPr>
+          <a:xfrm>
+            <a:off x="548640" y="1234440"/>
+            <a:ext cx="11064240" cy="4937760"/>
+          </a:xfrm>
+          <a:prstGeom prst="rect">
+            <a:avLst/>
+          </a:prstGeom>
+          <a:noFill/>
+        </p:spPr>
+        <p:txBody>
+          <a:bodyPr wrap="square">
+            <a:noAutofit/>
+          </a:bodyPr>
+          <a:lstStyle/>
+          <a:p>
+            <a:pPr lvl="0" marL="457200" indent="-228600">
+              <a:buFont typeface="Calibri"/>
+              <a:spcAft>
+                <a:spcPts val="1000"/>
+              </a:spcAft>
+              <a:buSzPct val="100000"/>
+              <a:buChar char="•"/>
+              <a:lnSpc>
+                <a:spcPts val="2200"/>
+              </a:lnSpc>
+            </a:pPr>
+            <a:r>
+              <a:rPr sz="2000" b="0">
+                <a:solidFill>
+                  <a:srgbClr val="333333"/>
+                </a:solidFill>
+                <a:latin typeface="Calibri"/>
+              </a:rPr>
+              <a:t>In the browser lab track, open the </a:t>
+            </a:r>
+            <a:r>
+              <a:rPr sz="2000" b="1">
+                <a:solidFill>
+                  <a:srgbClr val="333333"/>
+                </a:solidFill>
+                <a:latin typeface="Calibri"/>
+              </a:rPr>
+              <a:t>kl-partition</a:t>
+            </a:r>
+            <a:r>
+              <a:rPr sz="2000" b="0">
+                <a:solidFill>
+                  <a:srgbClr val="333333"/>
+                </a:solidFill>
+                <a:latin typeface="Calibri"/>
+              </a:rPr>
+              <a:t> lab from the tools shelf</a:t>
+            </a:r>
+          </a:p>
+          <a:p>
+            <a:pPr lvl="0" marL="457200" indent="-228600">
+              <a:buFont typeface="Calibri"/>
+              <a:spcAft>
+                <a:spcPts val="1000"/>
+              </a:spcAft>
+              <a:buSzPct val="100000"/>
+              <a:buChar char="•"/>
+              <a:lnSpc>
+                <a:spcPts val="2200"/>
+              </a:lnSpc>
+            </a:pPr>
+            <a:r>
+              <a:rPr sz="2000" b="0">
+                <a:solidFill>
+                  <a:srgbClr val="333333"/>
+                </a:solidFill>
+                <a:latin typeface="Calibri"/>
+              </a:rPr>
+              <a:t>Load the starter graph, run the algorithm once</a:t>
+            </a:r>
+          </a:p>
+          <a:p>
+            <a:pPr lvl="0" marL="457200" indent="-228600">
+              <a:buFont typeface="Calibri"/>
+              <a:spcAft>
+                <a:spcPts val="1000"/>
+              </a:spcAft>
+              <a:buSzPct val="100000"/>
+              <a:buChar char="•"/>
+              <a:lnSpc>
+                <a:spcPts val="2200"/>
+              </a:lnSpc>
+            </a:pPr>
+            <a:r>
+              <a:rPr sz="2000" b="0">
+                <a:solidFill>
+                  <a:srgbClr val="333333"/>
+                </a:solidFill>
+                <a:latin typeface="Calibri"/>
+              </a:rPr>
+              <a:t>Work the challenges that lock the goldens</a:t>
+            </a:r>
+          </a:p>
+        </p:txBody>
+      </p:sp>
+      <p:sp>
+        <p:nvSpPr>
+          <p:cNvPr id="4" name="TextBox 3"/>
+          <p:cNvSpPr txBox="1"/>
+          <p:nvPr/>
+        </p:nvSpPr>
+        <p:spPr>
+          <a:xfrm>
+            <a:off x="548640" y="6355080"/>
+            <a:ext cx="11064240" cy="320040"/>
+          </a:xfrm>
+          <a:prstGeom prst="rect">
+            <a:avLst/>
+          </a:prstGeom>
+          <a:noFill/>
+        </p:spPr>
+        <p:txBody>
+          <a:bodyPr wrap="square">
+            <a:noAutofit/>
+          </a:bodyPr>
+          <a:lstStyle/>
+          <a:p>
+            <a:pPr algn="r">
+              <a:lnSpc>
+                <a:spcPts val="2200"/>
+              </a:lnSpc>
+              <a:defRPr sz="1000" b="0">
+                <a:solidFill>
+                  <a:srgbClr val="666666"/>
+                </a:solidFill>
+                <a:latin typeface="Calibri"/>
+              </a:defRPr>
+            </a:pPr>
+            <a:r>
+              <a:t>learn_partitioning — 01 kl partition</a:t>
+            </a:r>
+          </a:p>
+        </p:txBody>
+      </p:sp>
+    </p:spTree>
+  </p:cSld>
+  <p:clrMapOvr>
+    <a:masterClrMapping/>
+  </p:clrMapOvr>
+</p:sld>
+</file>
+
+<file path=ppt/slides/slide12.xml><?xml version="1.0" encoding="utf-8"?>
+<p:sld xmlns:a="http://schemas.openxmlformats.org/drawingml/2006/main" xmlns:p="http://schemas.openxmlformats.org/presentationml/2006/main" xmlns:r="http://schemas.openxmlformats.org/officeDocument/2006/relationships">
+  <p:cSld>
+    <p:spTree>
+      <p:nvGrpSpPr>
+        <p:cNvPr id="1" name=""/>
+        <p:cNvGrpSpPr/>
+        <p:nvPr/>
+      </p:nvGrpSpPr>
+      <p:grpSpPr/>
+      <p:sp>
+        <p:nvSpPr>
+          <p:cNvPr id="2" name="TextBox 1"/>
+          <p:cNvSpPr txBox="1"/>
+          <p:nvPr/>
+        </p:nvSpPr>
+        <p:spPr>
+          <a:xfrm>
+            <a:off x="548640" y="411480"/>
+            <a:ext cx="11064240" cy="777240"/>
+          </a:xfrm>
+          <a:prstGeom prst="rect">
+            <a:avLst/>
+          </a:prstGeom>
+          <a:noFill/>
+        </p:spPr>
+        <p:txBody>
+          <a:bodyPr wrap="square">
+            <a:noAutofit/>
+          </a:bodyPr>
+          <a:lstStyle/>
+          <a:p>
+            <a:pPr>
+              <a:lnSpc>
+                <a:spcPts val="2200"/>
+              </a:lnSpc>
+            </a:pPr>
+            <a:r>
+              <a:rPr sz="2800" b="1">
+                <a:solidFill>
+                  <a:srgbClr val="1A1A2E"/>
+                </a:solidFill>
+                <a:latin typeface="Calibri"/>
+              </a:rPr>
+              <a:t>Implement track</a:t>
+            </a:r>
+          </a:p>
+        </p:txBody>
+      </p:sp>
+      <p:sp>
+        <p:nvSpPr>
+          <p:cNvPr id="3" name="TextBox 2"/>
+          <p:cNvSpPr txBox="1"/>
+          <p:nvPr/>
+        </p:nvSpPr>
+        <p:spPr>
+          <a:xfrm>
+            <a:off x="548640" y="1234440"/>
+            <a:ext cx="11064240" cy="4937760"/>
+          </a:xfrm>
+          <a:prstGeom prst="rect">
+            <a:avLst/>
+          </a:prstGeom>
+          <a:noFill/>
+        </p:spPr>
+        <p:txBody>
+          <a:bodyPr wrap="square">
+            <a:noAutofit/>
+          </a:bodyPr>
+          <a:lstStyle/>
+          <a:p>
+            <a:pPr lvl="0" marL="457200" indent="-228600">
+              <a:buFont typeface="Calibri"/>
+              <a:spcAft>
+                <a:spcPts val="1000"/>
+              </a:spcAft>
+              <a:buSzPct val="100000"/>
+              <a:buChar char="•"/>
+              <a:lnSpc>
+                <a:spcPts val="2200"/>
+              </a:lnSpc>
+            </a:pPr>
+            <a:r>
+              <a:rPr sz="2000" b="0">
+                <a:solidFill>
+                  <a:srgbClr val="333333"/>
+                </a:solidFill>
+                <a:latin typeface="Calibri"/>
+              </a:rPr>
+              <a:t>In the implement track</a:t>
+            </a:r>
+          </a:p>
+          <a:p>
+            <a:pPr lvl="0" marL="457200" indent="-228600">
+              <a:buFont typeface="Calibri"/>
+              <a:spcAft>
+                <a:spcPts val="1000"/>
+              </a:spcAft>
+              <a:buSzPct val="100000"/>
+              <a:buChar char="•"/>
+              <a:lnSpc>
+                <a:spcPts val="2200"/>
+              </a:lnSpc>
+            </a:pPr>
+            <a:r>
+              <a:rPr sz="2000" b="0">
+                <a:solidFill>
+                  <a:srgbClr val="333333"/>
+                </a:solidFill>
+                <a:latin typeface="Calibri"/>
+              </a:rPr>
+              <a:t>Parse the tiny graph, run the algorithm with a deterministic seed</a:t>
+            </a:r>
+          </a:p>
+          <a:p>
+            <a:pPr lvl="0" marL="457200" indent="-228600">
+              <a:buFont typeface="Calibri"/>
+              <a:spcAft>
+                <a:spcPts val="1000"/>
+              </a:spcAft>
+              <a:buSzPct val="100000"/>
+              <a:buChar char="•"/>
+              <a:lnSpc>
+                <a:spcPts val="2200"/>
+              </a:lnSpc>
+            </a:pPr>
+            <a:r>
+              <a:rPr sz="2000" b="0">
+                <a:solidFill>
+                  <a:srgbClr val="333333"/>
+                </a:solidFill>
+                <a:latin typeface="Calibri"/>
+              </a:rPr>
+              <a:t>Match the browser goldens before you claim the checklist</a:t>
+            </a:r>
+          </a:p>
+        </p:txBody>
+      </p:sp>
+      <p:sp>
+        <p:nvSpPr>
+          <p:cNvPr id="4" name="TextBox 3"/>
+          <p:cNvSpPr txBox="1"/>
+          <p:nvPr/>
+        </p:nvSpPr>
+        <p:spPr>
+          <a:xfrm>
+            <a:off x="548640" y="6355080"/>
+            <a:ext cx="11064240" cy="320040"/>
+          </a:xfrm>
+          <a:prstGeom prst="rect">
+            <a:avLst/>
+          </a:prstGeom>
+          <a:noFill/>
+        </p:spPr>
+        <p:txBody>
+          <a:bodyPr wrap="square">
+            <a:noAutofit/>
+          </a:bodyPr>
+          <a:lstStyle/>
+          <a:p>
+            <a:pPr algn="r">
+              <a:lnSpc>
+                <a:spcPts val="2200"/>
+              </a:lnSpc>
+              <a:defRPr sz="1000" b="0">
+                <a:solidFill>
+                  <a:srgbClr val="666666"/>
+                </a:solidFill>
+                <a:latin typeface="Calibri"/>
+              </a:defRPr>
+            </a:pPr>
+            <a:r>
+              <a:t>learn_partitioning — 01 kl partition</a:t>
+            </a:r>
+          </a:p>
+        </p:txBody>
+      </p:sp>
+    </p:spTree>
+  </p:cSld>
+  <p:clrMapOvr>
+    <a:masterClrMapping/>
+  </p:clrMapOvr>
+</p:sld>
+</file>
+
+<file path=ppt/slides/slide13.xml><?xml version="1.0" encoding="utf-8"?>
+<p:sld xmlns:a="http://schemas.openxmlformats.org/drawingml/2006/main" xmlns:p="http://schemas.openxmlformats.org/presentationml/2006/main" xmlns:r="http://schemas.openxmlformats.org/officeDocument/2006/relationships">
+  <p:cSld>
+    <p:spTree>
+      <p:nvGrpSpPr>
+        <p:cNvPr id="1" name=""/>
+        <p:cNvGrpSpPr/>
+        <p:nvPr/>
+      </p:nvGrpSpPr>
+      <p:grpSpPr/>
+      <p:sp>
+        <p:nvSpPr>
+          <p:cNvPr id="2" name="TextBox 1"/>
+          <p:cNvSpPr txBox="1"/>
+          <p:nvPr/>
+        </p:nvSpPr>
+        <p:spPr>
+          <a:xfrm>
+            <a:off x="548640" y="411480"/>
+            <a:ext cx="11064240" cy="777240"/>
+          </a:xfrm>
+          <a:prstGeom prst="rect">
+            <a:avLst/>
+          </a:prstGeom>
+          <a:noFill/>
+        </p:spPr>
+        <p:txBody>
+          <a:bodyPr wrap="square">
+            <a:noAutofit/>
+          </a:bodyPr>
+          <a:lstStyle/>
+          <a:p>
+            <a:pPr>
+              <a:lnSpc>
+                <a:spcPts val="2200"/>
+              </a:lnSpc>
+            </a:pPr>
+            <a:r>
+              <a:rPr sz="2800" b="1">
+                <a:solidFill>
+                  <a:srgbClr val="1A1A2E"/>
+                </a:solidFill>
+                <a:latin typeface="Calibri"/>
+              </a:rPr>
+              <a:t>Pitfalls</a:t>
+            </a:r>
+          </a:p>
+        </p:txBody>
+      </p:sp>
+      <p:sp>
+        <p:nvSpPr>
+          <p:cNvPr id="3" name="TextBox 2"/>
+          <p:cNvSpPr txBox="1"/>
+          <p:nvPr/>
+        </p:nvSpPr>
+        <p:spPr>
+          <a:xfrm>
+            <a:off x="548640" y="1234440"/>
+            <a:ext cx="11064240" cy="4937760"/>
+          </a:xfrm>
+          <a:prstGeom prst="rect">
+            <a:avLst/>
+          </a:prstGeom>
+          <a:noFill/>
+        </p:spPr>
+        <p:txBody>
+          <a:bodyPr wrap="square">
+            <a:noAutofit/>
+          </a:bodyPr>
+          <a:lstStyle/>
+          <a:p>
+            <a:pPr lvl="0" marL="457200" indent="-228600">
+              <a:buFont typeface="Calibri"/>
+              <a:spcAft>
+                <a:spcPts val="1000"/>
+              </a:spcAft>
+              <a:buSzPct val="100000"/>
+              <a:buChar char="•"/>
+              <a:lnSpc>
+                <a:spcPts val="2200"/>
+              </a:lnSpc>
+            </a:pPr>
+            <a:r>
+              <a:rPr sz="2000" b="0">
+                <a:solidFill>
+                  <a:srgbClr val="333333"/>
+                </a:solidFill>
+                <a:latin typeface="Calibri"/>
+              </a:rPr>
+              <a:t>Common traps</a:t>
+            </a:r>
+          </a:p>
+          <a:p>
+            <a:pPr lvl="0" marL="457200" indent="-228600">
+              <a:buFont typeface="Calibri"/>
+              <a:spcAft>
+                <a:spcPts val="1000"/>
+              </a:spcAft>
+              <a:buSzPct val="100000"/>
+              <a:buChar char="•"/>
+              <a:lnSpc>
+                <a:spcPts val="2200"/>
+              </a:lnSpc>
+            </a:pPr>
+            <a:r>
+              <a:rPr sz="2000" b="0">
+                <a:solidFill>
+                  <a:srgbClr val="333333"/>
+                </a:solidFill>
+                <a:latin typeface="Calibri"/>
+              </a:rPr>
+              <a:t>For multilevel flows, verify coarsening before you blame the refiner</a:t>
+            </a:r>
+          </a:p>
+        </p:txBody>
+      </p:sp>
+      <p:sp>
+        <p:nvSpPr>
+          <p:cNvPr id="4" name="TextBox 3"/>
+          <p:cNvSpPr txBox="1"/>
+          <p:nvPr/>
+        </p:nvSpPr>
+        <p:spPr>
+          <a:xfrm>
+            <a:off x="548640" y="6355080"/>
+            <a:ext cx="11064240" cy="320040"/>
+          </a:xfrm>
+          <a:prstGeom prst="rect">
+            <a:avLst/>
+          </a:prstGeom>
+          <a:noFill/>
+        </p:spPr>
+        <p:txBody>
+          <a:bodyPr wrap="square">
+            <a:noAutofit/>
+          </a:bodyPr>
+          <a:lstStyle/>
+          <a:p>
+            <a:pPr algn="r">
+              <a:lnSpc>
+                <a:spcPts val="2200"/>
+              </a:lnSpc>
+              <a:defRPr sz="1000" b="0">
+                <a:solidFill>
+                  <a:srgbClr val="666666"/>
+                </a:solidFill>
+                <a:latin typeface="Calibri"/>
+              </a:defRPr>
+            </a:pPr>
+            <a:r>
+              <a:t>learn_partitioning — 01 kl partition</a:t>
+            </a:r>
+          </a:p>
+        </p:txBody>
+      </p:sp>
+    </p:spTree>
+  </p:cSld>
+  <p:clrMapOvr>
+    <a:masterClrMapping/>
+  </p:clrMapOvr>
+</p:sld>
+</file>
+
+<file path=ppt/slides/slide14.xml><?xml version="1.0" encoding="utf-8"?>
+<p:sld xmlns:a="http://schemas.openxmlformats.org/drawingml/2006/main" xmlns:p="http://schemas.openxmlformats.org/presentationml/2006/main" xmlns:r="http://schemas.openxmlformats.org/officeDocument/2006/relationships">
+  <p:cSld>
+    <p:spTree>
+      <p:nvGrpSpPr>
+        <p:cNvPr id="1" name=""/>
+        <p:cNvGrpSpPr/>
+        <p:nvPr/>
+      </p:nvGrpSpPr>
+      <p:grpSpPr/>
+      <p:sp>
+        <p:nvSpPr>
+          <p:cNvPr id="2" name="TextBox 1"/>
+          <p:cNvSpPr txBox="1"/>
+          <p:nvPr/>
+        </p:nvSpPr>
+        <p:spPr>
+          <a:xfrm>
+            <a:off x="548640" y="411480"/>
+            <a:ext cx="11064240" cy="777240"/>
+          </a:xfrm>
+          <a:prstGeom prst="rect">
+            <a:avLst/>
+          </a:prstGeom>
+          <a:noFill/>
+        </p:spPr>
+        <p:txBody>
+          <a:bodyPr wrap="square">
+            <a:noAutofit/>
+          </a:bodyPr>
+          <a:lstStyle/>
+          <a:p>
+            <a:pPr>
+              <a:lnSpc>
+                <a:spcPts val="2200"/>
+              </a:lnSpc>
+            </a:pPr>
+            <a:r>
+              <a:rPr sz="2800" b="1">
+                <a:solidFill>
+                  <a:srgbClr val="1A1A2E"/>
+                </a:solidFill>
+                <a:latin typeface="Calibri"/>
+              </a:rPr>
               <a:t>Your turn</a:t>
             </a:r>
           </a:p>
@@ -4822,6 +5506,125 @@
               <a:t>Pass one then finds nothing and KL stops at a local optimum for swap moves</a:t>
             </a:r>
           </a:p>
+        </p:txBody>
+      </p:sp>
+      <p:sp>
+        <p:nvSpPr>
+          <p:cNvPr id="4" name="TextBox 3"/>
+          <p:cNvSpPr txBox="1"/>
+          <p:nvPr/>
+        </p:nvSpPr>
+        <p:spPr>
+          <a:xfrm>
+            <a:off x="548640" y="6355080"/>
+            <a:ext cx="11064240" cy="320040"/>
+          </a:xfrm>
+          <a:prstGeom prst="rect">
+            <a:avLst/>
+          </a:prstGeom>
+          <a:noFill/>
+        </p:spPr>
+        <p:txBody>
+          <a:bodyPr wrap="square">
+            <a:noAutofit/>
+          </a:bodyPr>
+          <a:lstStyle/>
+          <a:p>
+            <a:pPr algn="r">
+              <a:lnSpc>
+                <a:spcPts val="2200"/>
+              </a:lnSpc>
+              <a:defRPr sz="1000" b="0">
+                <a:solidFill>
+                  <a:srgbClr val="666666"/>
+                </a:solidFill>
+                <a:latin typeface="Calibri"/>
+              </a:defRPr>
+            </a:pPr>
+            <a:r>
+              <a:t>learn_partitioning — 01 kl partition</a:t>
+            </a:r>
+          </a:p>
+        </p:txBody>
+      </p:sp>
+    </p:spTree>
+  </p:cSld>
+  <p:clrMapOvr>
+    <a:masterClrMapping/>
+  </p:clrMapOvr>
+</p:sld>
+</file>
+
+<file path=ppt/slides/slide3.xml><?xml version="1.0" encoding="utf-8"?>
+<p:sld xmlns:a="http://schemas.openxmlformats.org/drawingml/2006/main" xmlns:p="http://schemas.openxmlformats.org/presentationml/2006/main" xmlns:r="http://schemas.openxmlformats.org/officeDocument/2006/relationships">
+  <p:cSld>
+    <p:spTree>
+      <p:nvGrpSpPr>
+        <p:cNvPr id="1" name=""/>
+        <p:cNvGrpSpPr/>
+        <p:nvPr/>
+      </p:nvGrpSpPr>
+      <p:grpSpPr/>
+      <p:sp>
+        <p:nvSpPr>
+          <p:cNvPr id="2" name="TextBox 1"/>
+          <p:cNvSpPr txBox="1"/>
+          <p:nvPr/>
+        </p:nvSpPr>
+        <p:spPr>
+          <a:xfrm>
+            <a:off x="548640" y="411480"/>
+            <a:ext cx="11064240" cy="777240"/>
+          </a:xfrm>
+          <a:prstGeom prst="rect">
+            <a:avLst/>
+          </a:prstGeom>
+          <a:noFill/>
+        </p:spPr>
+        <p:txBody>
+          <a:bodyPr wrap="square">
+            <a:noAutofit/>
+          </a:bodyPr>
+          <a:lstStyle/>
+          <a:p>
+            <a:pPr>
+              <a:lnSpc>
+                <a:spcPts val="2200"/>
+              </a:lnSpc>
+            </a:pPr>
+            <a:r>
+              <a:rPr sz="2800" b="1">
+                <a:solidFill>
+                  <a:srgbClr val="1A1A2E"/>
+                </a:solidFill>
+                <a:latin typeface="Calibri"/>
+              </a:rPr>
+              <a:t>Pseudocode</a:t>
+            </a:r>
+          </a:p>
+        </p:txBody>
+      </p:sp>
+      <p:sp>
+        <p:nvSpPr>
+          <p:cNvPr id="3" name="TextBox 2"/>
+          <p:cNvSpPr txBox="1"/>
+          <p:nvPr/>
+        </p:nvSpPr>
+        <p:spPr>
+          <a:xfrm>
+            <a:off x="548640" y="1234440"/>
+            <a:ext cx="11064240" cy="4937760"/>
+          </a:xfrm>
+          <a:prstGeom prst="rect">
+            <a:avLst/>
+          </a:prstGeom>
+          <a:noFill/>
+        </p:spPr>
+        <p:txBody>
+          <a:bodyPr wrap="square">
+            <a:noAutofit/>
+          </a:bodyPr>
+          <a:lstStyle/>
           <a:p>
             <a:pPr lvl="0" marL="457200" indent="-228600">
               <a:buFont typeface="Calibri"/>
@@ -4841,7 +5644,73 @@
                 </a:solidFill>
                 <a:latin typeface="Calibri"/>
               </a:rPr>
-              <a:t>&lt;!-- algorithm-walkthrough --&gt;</a:t>
+              <a:t>KL pseudocode builds a locked swap sequence each pass</a:t>
+            </a:r>
+          </a:p>
+          <a:p>
+            <a:pPr lvl="0" marL="457200" indent="-228600">
+              <a:buFont typeface="Calibri"/>
+              <a:spcAft>
+                <a:spcPts val="1000"/>
+              </a:spcAft>
+              <a:buSzPct val="100000"/>
+              <a:buChar char="•"/>
+              <a:lnSpc>
+                <a:spcPts val="2200"/>
+              </a:lnSpc>
+            </a:pPr>
+            <a:r>
+              <a:rPr sz="2000" b="0">
+                <a:solidFill>
+                  <a:srgbClr val="333333"/>
+                </a:solidFill>
+                <a:latin typeface="Calibri"/>
+              </a:rPr>
+              <a:t>Pair gain uses D-values minus twice the edge between the pair</a:t>
+            </a:r>
+          </a:p>
+          <a:p>
+            <a:pPr lvl="0" marL="457200" indent="-228600">
+              <a:buFont typeface="Calibri"/>
+              <a:spcAft>
+                <a:spcPts val="1000"/>
+              </a:spcAft>
+              <a:buSzPct val="100000"/>
+              <a:buChar char="•"/>
+              <a:lnSpc>
+                <a:spcPts val="2200"/>
+              </a:lnSpc>
+            </a:pPr>
+            <a:r>
+              <a:rPr sz="2000" b="0">
+                <a:solidFill>
+                  <a:srgbClr val="333333"/>
+                </a:solidFill>
+                <a:latin typeface="Calibri"/>
+              </a:rPr>
+              <a:t>Open this module's examples file and find the Pseudocode section</a:t>
+            </a:r>
+          </a:p>
+          <a:p>
+            <a:pPr lvl="0" marL="457200" indent="-228600">
+              <a:buFont typeface="Calibri"/>
+              <a:spcAft>
+                <a:spcPts val="1000"/>
+              </a:spcAft>
+              <a:buSzPct val="100000"/>
+              <a:buChar char="•"/>
+              <a:lnSpc>
+                <a:spcPts val="2200"/>
+              </a:lnSpc>
+            </a:pPr>
+            <a:r>
+              <a:rPr sz="2000" b="0">
+                <a:solidFill>
+                  <a:srgbClr val="333333"/>
+                </a:solidFill>
+                <a:latin typeface="Calibri"/>
+              </a:rPr>
+              <a:t>That written sketch is what you implement on the implement track and what the browser</a:t>
             </a:r>
           </a:p>
         </p:txBody>
@@ -4893,7 +5762,443 @@
 </p:sld>
 </file>
 
-<file path=ppt/slides/slide3.xml><?xml version="1.0" encoding="utf-8"?>
+<file path=ppt/slides/slide4.xml><?xml version="1.0" encoding="utf-8"?>
+<p:sld xmlns:a="http://schemas.openxmlformats.org/drawingml/2006/main" xmlns:p="http://schemas.openxmlformats.org/presentationml/2006/main" xmlns:r="http://schemas.openxmlformats.org/officeDocument/2006/relationships">
+  <p:cSld>
+    <p:spTree>
+      <p:nvGrpSpPr>
+        <p:cNvPr id="1" name=""/>
+        <p:cNvGrpSpPr/>
+        <p:nvPr/>
+      </p:nvGrpSpPr>
+      <p:grpSpPr/>
+      <p:sp>
+        <p:nvSpPr>
+          <p:cNvPr id="2" name="TextBox 1"/>
+          <p:cNvSpPr txBox="1"/>
+          <p:nvPr/>
+        </p:nvSpPr>
+        <p:spPr>
+          <a:xfrm>
+            <a:off x="548640" y="411480"/>
+            <a:ext cx="11064240" cy="777240"/>
+          </a:xfrm>
+          <a:prstGeom prst="rect">
+            <a:avLst/>
+          </a:prstGeom>
+          <a:noFill/>
+        </p:spPr>
+        <p:txBody>
+          <a:bodyPr wrap="square">
+            <a:noAutofit/>
+          </a:bodyPr>
+          <a:lstStyle/>
+          <a:p>
+            <a:pPr>
+              <a:lnSpc>
+                <a:spcPts val="2200"/>
+              </a:lnSpc>
+            </a:pPr>
+            <a:r>
+              <a:rPr sz="2800" b="1">
+                <a:solidFill>
+                  <a:srgbClr val="1A1A2E"/>
+                </a:solidFill>
+                <a:latin typeface="Calibri"/>
+              </a:rPr>
+              <a:t>Algorithm sketch</a:t>
+            </a:r>
+          </a:p>
+        </p:txBody>
+      </p:sp>
+      <p:sp>
+        <p:nvSpPr>
+          <p:cNvPr id="3" name="TextBox 2"/>
+          <p:cNvSpPr txBox="1"/>
+          <p:nvPr/>
+        </p:nvSpPr>
+        <p:spPr>
+          <a:xfrm>
+            <a:off x="548640" y="1234440"/>
+            <a:ext cx="11064240" cy="4937760"/>
+          </a:xfrm>
+          <a:prstGeom prst="rect">
+            <a:avLst/>
+          </a:prstGeom>
+          <a:noFill/>
+        </p:spPr>
+        <p:txBody>
+          <a:bodyPr wrap="square">
+            <a:noAutofit/>
+          </a:bodyPr>
+          <a:lstStyle/>
+          <a:p>
+            <a:pPr lvl="0" marL="457200" indent="-228600">
+              <a:buFont typeface="Calibri"/>
+              <a:spcAft>
+                <a:spcPts val="1000"/>
+              </a:spcAft>
+              <a:buSzPct val="100000"/>
+              <a:buChar char="•"/>
+              <a:lnSpc>
+                <a:spcPts val="2200"/>
+              </a:lnSpc>
+            </a:pPr>
+            <a:r>
+              <a:rPr sz="2000" b="0">
+                <a:solidFill>
+                  <a:srgbClr val="333333"/>
+                </a:solidFill>
+                <a:latin typeface="Calibri"/>
+              </a:rPr>
+              <a:t>From the cutsize-twelve bad seed the winning prefix is one swap, A with D</a:t>
+            </a:r>
+          </a:p>
+          <a:p>
+            <a:pPr lvl="0" marL="457200" indent="-228600">
+              <a:buFont typeface="Calibri"/>
+              <a:spcAft>
+                <a:spcPts val="1000"/>
+              </a:spcAft>
+              <a:buSzPct val="100000"/>
+              <a:buChar char="•"/>
+              <a:lnSpc>
+                <a:spcPts val="2200"/>
+              </a:lnSpc>
+            </a:pPr>
+            <a:r>
+              <a:rPr sz="2000" b="0">
+                <a:solidFill>
+                  <a:srgbClr val="333333"/>
+                </a:solidFill>
+                <a:latin typeface="Calibri"/>
+              </a:rPr>
+              <a:t>The sketch lands on ABC versus DE at cut three, then the next pass stops</a:t>
+            </a:r>
+          </a:p>
+        </p:txBody>
+      </p:sp>
+      <p:sp>
+        <p:nvSpPr>
+          <p:cNvPr id="4" name="TextBox 3"/>
+          <p:cNvSpPr txBox="1"/>
+          <p:nvPr/>
+        </p:nvSpPr>
+        <p:spPr>
+          <a:xfrm>
+            <a:off x="548640" y="6355080"/>
+            <a:ext cx="11064240" cy="320040"/>
+          </a:xfrm>
+          <a:prstGeom prst="rect">
+            <a:avLst/>
+          </a:prstGeom>
+          <a:noFill/>
+        </p:spPr>
+        <p:txBody>
+          <a:bodyPr wrap="square">
+            <a:noAutofit/>
+          </a:bodyPr>
+          <a:lstStyle/>
+          <a:p>
+            <a:pPr algn="r">
+              <a:lnSpc>
+                <a:spcPts val="2200"/>
+              </a:lnSpc>
+              <a:defRPr sz="1000" b="0">
+                <a:solidFill>
+                  <a:srgbClr val="666666"/>
+                </a:solidFill>
+                <a:latin typeface="Calibri"/>
+              </a:defRPr>
+            </a:pPr>
+            <a:r>
+              <a:t>learn_partitioning — 01 kl partition</a:t>
+            </a:r>
+          </a:p>
+        </p:txBody>
+      </p:sp>
+    </p:spTree>
+  </p:cSld>
+  <p:clrMapOvr>
+    <a:masterClrMapping/>
+  </p:clrMapOvr>
+</p:sld>
+</file>
+
+<file path=ppt/slides/slide5.xml><?xml version="1.0" encoding="utf-8"?>
+<p:sld xmlns:a="http://schemas.openxmlformats.org/drawingml/2006/main" xmlns:p="http://schemas.openxmlformats.org/presentationml/2006/main" xmlns:r="http://schemas.openxmlformats.org/officeDocument/2006/relationships">
+  <p:cSld>
+    <p:spTree>
+      <p:nvGrpSpPr>
+        <p:cNvPr id="1" name=""/>
+        <p:cNvGrpSpPr/>
+        <p:nvPr/>
+      </p:nvGrpSpPr>
+      <p:grpSpPr/>
+      <p:sp>
+        <p:nvSpPr>
+          <p:cNvPr id="2" name="TextBox 1"/>
+          <p:cNvSpPr txBox="1"/>
+          <p:nvPr/>
+        </p:nvSpPr>
+        <p:spPr>
+          <a:xfrm>
+            <a:off x="548640" y="411480"/>
+            <a:ext cx="11064240" cy="777240"/>
+          </a:xfrm>
+          <a:prstGeom prst="rect">
+            <a:avLst/>
+          </a:prstGeom>
+          <a:noFill/>
+        </p:spPr>
+        <p:txBody>
+          <a:bodyPr wrap="square">
+            <a:noAutofit/>
+          </a:bodyPr>
+          <a:lstStyle/>
+          <a:p>
+            <a:pPr>
+              <a:lnSpc>
+                <a:spcPts val="2200"/>
+              </a:lnSpc>
+            </a:pPr>
+            <a:r>
+              <a:rPr sz="2800" b="1">
+                <a:solidFill>
+                  <a:srgbClr val="1A1A2E"/>
+                </a:solidFill>
+                <a:latin typeface="Calibri"/>
+              </a:rPr>
+              <a:t>Algorithm sketch — try these</a:t>
+            </a:r>
+          </a:p>
+        </p:txBody>
+      </p:sp>
+      <p:sp>
+        <p:nvSpPr>
+          <p:cNvPr id="3" name="TextBox 2"/>
+          <p:cNvSpPr txBox="1"/>
+          <p:nvPr/>
+        </p:nvSpPr>
+        <p:spPr>
+          <a:xfrm>
+            <a:off x="548640" y="1143000"/>
+            <a:ext cx="11064240" cy="5029200"/>
+          </a:xfrm>
+          <a:prstGeom prst="rect">
+            <a:avLst/>
+          </a:prstGeom>
+          <a:solidFill>
+            <a:srgbClr val="F4F4F4"/>
+          </a:solidFill>
+        </p:spPr>
+        <p:txBody>
+          <a:bodyPr wrap="square">
+            <a:noAutofit/>
+          </a:bodyPr>
+          <a:lstStyle/>
+          <a:p>
+            <a:pPr>
+              <a:lnSpc>
+                <a:spcPts val="2200"/>
+              </a:lnSpc>
+              <a:spcAft>
+                <a:spcPts val="400"/>
+              </a:spcAft>
+            </a:pPr>
+            <a:r>
+              <a:rPr sz="2000" b="0">
+                <a:solidFill>
+                  <a:srgbClr val="333333"/>
+                </a:solidFill>
+                <a:latin typeface="Consolas"/>
+              </a:rPr>
+              <a:t>INPUT: bipartition side[], max_passes</a:t>
+            </a:r>
+          </a:p>
+          <a:p>
+            <a:pPr>
+              <a:lnSpc>
+                <a:spcPts val="2200"/>
+              </a:lnSpc>
+              <a:spcAft>
+                <a:spcPts val="400"/>
+              </a:spcAft>
+            </a:pPr>
+            <a:r>
+              <a:rPr sz="2000" b="0">
+                <a:solidFill>
+                  <a:srgbClr val="333333"/>
+                </a:solidFill>
+                <a:latin typeface="Consolas"/>
+              </a:rPr>
+              <a:t>OUTPUT: refined side[]</a:t>
+            </a:r>
+          </a:p>
+          <a:p>
+            <a:pPr>
+              <a:lnSpc>
+                <a:spcPts val="2200"/>
+              </a:lnSpc>
+              <a:spcAft>
+                <a:spcPts val="400"/>
+              </a:spcAft>
+            </a:pPr>
+            <a:r>
+              <a:rPr sz="2000" b="0">
+                <a:solidFill>
+                  <a:srgbClr val="333333"/>
+                </a:solidFill>
+                <a:latin typeface="Consolas"/>
+              </a:rPr>
+              <a:t>each pass: unlock all; compute D-values</a:t>
+            </a:r>
+          </a:p>
+          <a:p>
+            <a:pPr>
+              <a:lnSpc>
+                <a:spcPts val="2200"/>
+              </a:lnSpc>
+              <a:spcAft>
+                <a:spcPts val="400"/>
+              </a:spcAft>
+            </a:pPr>
+            <a:r>
+              <a:rPr sz="2000" b="0">
+                <a:solidFill>
+                  <a:srgbClr val="333333"/>
+                </a:solidFill>
+                <a:latin typeface="Consolas"/>
+              </a:rPr>
+              <a:t>repeat |V|/2: pick unlocked pair max swap gain</a:t>
+            </a:r>
+          </a:p>
+          <a:p>
+            <a:pPr>
+              <a:lnSpc>
+                <a:spcPts val="2200"/>
+              </a:lnSpc>
+              <a:spcAft>
+                <a:spcPts val="400"/>
+              </a:spcAft>
+            </a:pPr>
+            <a:r>
+              <a:rPr sz="2000" b="0">
+                <a:solidFill>
+                  <a:srgbClr val="333333"/>
+                </a:solidFill>
+                <a:latin typeface="Consolas"/>
+              </a:rPr>
+              <a:t>  lock pair; update working sides + D</a:t>
+            </a:r>
+          </a:p>
+          <a:p>
+            <a:pPr>
+              <a:lnSpc>
+                <a:spcPts val="2200"/>
+              </a:lnSpc>
+              <a:spcAft>
+                <a:spcPts val="400"/>
+              </a:spcAft>
+            </a:pPr>
+            <a:r>
+              <a:rPr sz="2000" b="0">
+                <a:solidFill>
+                  <a:srgbClr val="333333"/>
+                </a:solidFill>
+                <a:latin typeface="Consolas"/>
+              </a:rPr>
+              <a:t>keep prefix with best cumulative gain (&gt;0)</a:t>
+            </a:r>
+          </a:p>
+          <a:p>
+            <a:pPr>
+              <a:lnSpc>
+                <a:spcPts val="2200"/>
+              </a:lnSpc>
+              <a:spcAft>
+                <a:spcPts val="400"/>
+              </a:spcAft>
+            </a:pPr>
+            <a:r>
+              <a:rPr sz="2000" b="0">
+                <a:solidFill>
+                  <a:srgbClr val="333333"/>
+                </a:solidFill>
+                <a:latin typeface="Consolas"/>
+              </a:rPr>
+              <a:t>apply prefix; stop if no improving pass</a:t>
+            </a:r>
+          </a:p>
+          <a:p>
+            <a:pPr>
+              <a:lnSpc>
+                <a:spcPts val="2200"/>
+              </a:lnSpc>
+              <a:spcAft>
+                <a:spcPts val="400"/>
+              </a:spcAft>
+            </a:pPr>
+            <a:r>
+              <a:rPr sz="2000" b="0">
+                <a:solidFill>
+                  <a:srgbClr val="333333"/>
+                </a:solidFill>
+                <a:latin typeface="Consolas"/>
+              </a:rPr>
+              <a:t>GOLDEN BAD_SEED cut 12 → ABC|DE cut 3</a:t>
+            </a:r>
+          </a:p>
+        </p:txBody>
+      </p:sp>
+      <p:sp>
+        <p:nvSpPr>
+          <p:cNvPr id="4" name="TextBox 3"/>
+          <p:cNvSpPr txBox="1"/>
+          <p:nvPr/>
+        </p:nvSpPr>
+        <p:spPr>
+          <a:xfrm>
+            <a:off x="548640" y="6355080"/>
+            <a:ext cx="11064240" cy="320040"/>
+          </a:xfrm>
+          <a:prstGeom prst="rect">
+            <a:avLst/>
+          </a:prstGeom>
+          <a:noFill/>
+        </p:spPr>
+        <p:txBody>
+          <a:bodyPr wrap="square">
+            <a:noAutofit/>
+          </a:bodyPr>
+          <a:lstStyle/>
+          <a:p>
+            <a:pPr algn="r">
+              <a:lnSpc>
+                <a:spcPts val="2200"/>
+              </a:lnSpc>
+              <a:defRPr sz="1000" b="0">
+                <a:solidFill>
+                  <a:srgbClr val="666666"/>
+                </a:solidFill>
+                <a:latin typeface="Calibri"/>
+              </a:defRPr>
+            </a:pPr>
+            <a:r>
+              <a:t>learn_partitioning — 01 kl partition</a:t>
+            </a:r>
+          </a:p>
+        </p:txBody>
+      </p:sp>
+    </p:spTree>
+  </p:cSld>
+  <p:clrMapOvr>
+    <a:masterClrMapping/>
+  </p:clrMapOvr>
+</p:sld>
+</file>
+
+<file path=ppt/slides/slide6.xml><?xml version="1.0" encoding="utf-8"?>
 <p:sld xmlns:a="http://schemas.openxmlformats.org/drawingml/2006/main" xmlns:p="http://schemas.openxmlformats.org/presentationml/2006/main" xmlns:r="http://schemas.openxmlformats.org/officeDocument/2006/relationships">
   <p:cSld>
     <p:spTree>
@@ -5052,7 +6357,7 @@
 </p:sld>
 </file>
 
-<file path=ppt/slides/slide4.xml><?xml version="1.0" encoding="utf-8"?>
+<file path=ppt/slides/slide7.xml><?xml version="1.0" encoding="utf-8"?>
 <p:sld xmlns:a="http://schemas.openxmlformats.org/drawingml/2006/main" xmlns:p="http://schemas.openxmlformats.org/presentationml/2006/main" xmlns:r="http://schemas.openxmlformats.org/officeDocument/2006/relationships">
   <p:cSld>
     <p:spTree>
@@ -5211,7 +6516,7 @@
 </p:sld>
 </file>
 
-<file path=ppt/slides/slide5.xml><?xml version="1.0" encoding="utf-8"?>
+<file path=ppt/slides/slide8.xml><?xml version="1.0" encoding="utf-8"?>
 <p:sld xmlns:a="http://schemas.openxmlformats.org/drawingml/2006/main" xmlns:p="http://schemas.openxmlformats.org/presentationml/2006/main" xmlns:r="http://schemas.openxmlformats.org/officeDocument/2006/relationships">
   <p:cSld>
     <p:spTree>
@@ -5370,7 +6675,7 @@
 </p:sld>
 </file>
 
-<file path=ppt/slides/slide6.xml><?xml version="1.0" encoding="utf-8"?>
+<file path=ppt/slides/slide9.xml><?xml version="1.0" encoding="utf-8"?>
 <p:sld xmlns:a="http://schemas.openxmlformats.org/drawingml/2006/main" xmlns:p="http://schemas.openxmlformats.org/presentationml/2006/main" xmlns:r="http://schemas.openxmlformats.org/officeDocument/2006/relationships">
   <p:cSld>
     <p:spTree>
@@ -5485,553 +6790,6 @@
       <p:sp>
         <p:nvSpPr>
           <p:cNvPr id="5" name="TextBox 4"/>
-          <p:cNvSpPr txBox="1"/>
-          <p:nvPr/>
-        </p:nvSpPr>
-        <p:spPr>
-          <a:xfrm>
-            <a:off x="548640" y="6355080"/>
-            <a:ext cx="11064240" cy="320040"/>
-          </a:xfrm>
-          <a:prstGeom prst="rect">
-            <a:avLst/>
-          </a:prstGeom>
-          <a:noFill/>
-        </p:spPr>
-        <p:txBody>
-          <a:bodyPr wrap="square">
-            <a:noAutofit/>
-          </a:bodyPr>
-          <a:lstStyle/>
-          <a:p>
-            <a:pPr algn="r">
-              <a:lnSpc>
-                <a:spcPts val="2200"/>
-              </a:lnSpc>
-              <a:defRPr sz="1000" b="0">
-                <a:solidFill>
-                  <a:srgbClr val="666666"/>
-                </a:solidFill>
-                <a:latin typeface="Calibri"/>
-              </a:defRPr>
-            </a:pPr>
-            <a:r>
-              <a:t>learn_partitioning — 01 kl partition</a:t>
-            </a:r>
-          </a:p>
-        </p:txBody>
-      </p:sp>
-    </p:spTree>
-  </p:cSld>
-  <p:clrMapOvr>
-    <a:masterClrMapping/>
-  </p:clrMapOvr>
-</p:sld>
-</file>
-
-<file path=ppt/slides/slide7.xml><?xml version="1.0" encoding="utf-8"?>
-<p:sld xmlns:a="http://schemas.openxmlformats.org/drawingml/2006/main" xmlns:p="http://schemas.openxmlformats.org/presentationml/2006/main" xmlns:r="http://schemas.openxmlformats.org/officeDocument/2006/relationships">
-  <p:cSld>
-    <p:spTree>
-      <p:nvGrpSpPr>
-        <p:cNvPr id="1" name=""/>
-        <p:cNvGrpSpPr/>
-        <p:nvPr/>
-      </p:nvGrpSpPr>
-      <p:grpSpPr/>
-      <p:sp>
-        <p:nvSpPr>
-          <p:cNvPr id="2" name="TextBox 1"/>
-          <p:cNvSpPr txBox="1"/>
-          <p:nvPr/>
-        </p:nvSpPr>
-        <p:spPr>
-          <a:xfrm>
-            <a:off x="548640" y="411480"/>
-            <a:ext cx="11064240" cy="777240"/>
-          </a:xfrm>
-          <a:prstGeom prst="rect">
-            <a:avLst/>
-          </a:prstGeom>
-          <a:noFill/>
-        </p:spPr>
-        <p:txBody>
-          <a:bodyPr wrap="square">
-            <a:noAutofit/>
-          </a:bodyPr>
-          <a:lstStyle/>
-          <a:p>
-            <a:pPr>
-              <a:lnSpc>
-                <a:spcPts val="2200"/>
-              </a:lnSpc>
-            </a:pPr>
-            <a:r>
-              <a:rPr sz="2800" b="1">
-                <a:solidFill>
-                  <a:srgbClr val="1A1A2E"/>
-                </a:solidFill>
-                <a:latin typeface="Calibri"/>
-              </a:rPr>
-              <a:t>Next pass finds nothing</a:t>
-            </a:r>
-          </a:p>
-        </p:txBody>
-      </p:sp>
-      <p:pic>
-        <p:nvPicPr>
-          <p:cNvPr id="3" name="Picture 2" descr="05-pass1-stop.png"/>
-          <p:cNvPicPr>
-            <a:picLocks noChangeAspect="1"/>
-          </p:cNvPicPr>
-          <p:nvPr/>
-        </p:nvPicPr>
-        <p:blipFill>
-          <a:blip r:embed="rId2"/>
-          <a:stretch>
-            <a:fillRect/>
-          </a:stretch>
-        </p:blipFill>
-        <p:spPr>
-          <a:xfrm>
-            <a:off x="548640" y="1143000"/>
-            <a:ext cx="9404113" cy="4572000"/>
-          </a:xfrm>
-          <a:prstGeom prst="rect">
-            <a:avLst/>
-          </a:prstGeom>
-        </p:spPr>
-      </p:pic>
-      <p:sp>
-        <p:nvSpPr>
-          <p:cNvPr id="4" name="TextBox 3"/>
-          <p:cNvSpPr txBox="1"/>
-          <p:nvPr/>
-        </p:nvSpPr>
-        <p:spPr>
-          <a:xfrm>
-            <a:off x="548640" y="5897880"/>
-            <a:ext cx="11064240" cy="411480"/>
-          </a:xfrm>
-          <a:prstGeom prst="rect">
-            <a:avLst/>
-          </a:prstGeom>
-          <a:noFill/>
-        </p:spPr>
-        <p:txBody>
-          <a:bodyPr wrap="square">
-            <a:noAutofit/>
-          </a:bodyPr>
-          <a:lstStyle/>
-          <a:p>
-            <a:pPr>
-              <a:lnSpc>
-                <a:spcPts val="2200"/>
-              </a:lnSpc>
-            </a:pPr>
-            <a:r>
-              <a:rPr sz="1200" b="0">
-                <a:solidFill>
-                  <a:srgbClr val="333333"/>
-                </a:solidFill>
-                <a:latin typeface="Calibri"/>
-              </a:rPr>
-              <a:t>Next pass finds nothing</a:t>
-            </a:r>
-          </a:p>
-        </p:txBody>
-      </p:sp>
-      <p:sp>
-        <p:nvSpPr>
-          <p:cNvPr id="5" name="TextBox 4"/>
-          <p:cNvSpPr txBox="1"/>
-          <p:nvPr/>
-        </p:nvSpPr>
-        <p:spPr>
-          <a:xfrm>
-            <a:off x="548640" y="6355080"/>
-            <a:ext cx="11064240" cy="320040"/>
-          </a:xfrm>
-          <a:prstGeom prst="rect">
-            <a:avLst/>
-          </a:prstGeom>
-          <a:noFill/>
-        </p:spPr>
-        <p:txBody>
-          <a:bodyPr wrap="square">
-            <a:noAutofit/>
-          </a:bodyPr>
-          <a:lstStyle/>
-          <a:p>
-            <a:pPr algn="r">
-              <a:lnSpc>
-                <a:spcPts val="2200"/>
-              </a:lnSpc>
-              <a:defRPr sz="1000" b="0">
-                <a:solidFill>
-                  <a:srgbClr val="666666"/>
-                </a:solidFill>
-                <a:latin typeface="Calibri"/>
-              </a:defRPr>
-            </a:pPr>
-            <a:r>
-              <a:t>learn_partitioning — 01 kl partition</a:t>
-            </a:r>
-          </a:p>
-        </p:txBody>
-      </p:sp>
-    </p:spTree>
-  </p:cSld>
-  <p:clrMapOvr>
-    <a:masterClrMapping/>
-  </p:clrMapOvr>
-</p:sld>
-</file>
-
-<file path=ppt/slides/slide8.xml><?xml version="1.0" encoding="utf-8"?>
-<p:sld xmlns:a="http://schemas.openxmlformats.org/drawingml/2006/main" xmlns:p="http://schemas.openxmlformats.org/presentationml/2006/main" xmlns:r="http://schemas.openxmlformats.org/officeDocument/2006/relationships">
-  <p:cSld>
-    <p:spTree>
-      <p:nvGrpSpPr>
-        <p:cNvPr id="1" name=""/>
-        <p:cNvGrpSpPr/>
-        <p:nvPr/>
-      </p:nvGrpSpPr>
-      <p:grpSpPr/>
-      <p:sp>
-        <p:nvSpPr>
-          <p:cNvPr id="2" name="TextBox 1"/>
-          <p:cNvSpPr txBox="1"/>
-          <p:nvPr/>
-        </p:nvSpPr>
-        <p:spPr>
-          <a:xfrm>
-            <a:off x="548640" y="411480"/>
-            <a:ext cx="11064240" cy="777240"/>
-          </a:xfrm>
-          <a:prstGeom prst="rect">
-            <a:avLst/>
-          </a:prstGeom>
-          <a:noFill/>
-        </p:spPr>
-        <p:txBody>
-          <a:bodyPr wrap="square">
-            <a:noAutofit/>
-          </a:bodyPr>
-          <a:lstStyle/>
-          <a:p>
-            <a:pPr>
-              <a:lnSpc>
-                <a:spcPts val="2200"/>
-              </a:lnSpc>
-            </a:pPr>
-            <a:r>
-              <a:rPr sz="2800" b="1">
-                <a:solidFill>
-                  <a:srgbClr val="1A1A2E"/>
-                </a:solidFill>
-                <a:latin typeface="Calibri"/>
-              </a:rPr>
-              <a:t>Browser lab track</a:t>
-            </a:r>
-          </a:p>
-        </p:txBody>
-      </p:sp>
-      <p:sp>
-        <p:nvSpPr>
-          <p:cNvPr id="3" name="TextBox 2"/>
-          <p:cNvSpPr txBox="1"/>
-          <p:nvPr/>
-        </p:nvSpPr>
-        <p:spPr>
-          <a:xfrm>
-            <a:off x="548640" y="1234440"/>
-            <a:ext cx="11064240" cy="4937760"/>
-          </a:xfrm>
-          <a:prstGeom prst="rect">
-            <a:avLst/>
-          </a:prstGeom>
-          <a:noFill/>
-        </p:spPr>
-        <p:txBody>
-          <a:bodyPr wrap="square">
-            <a:noAutofit/>
-          </a:bodyPr>
-          <a:lstStyle/>
-          <a:p>
-            <a:pPr lvl="0" marL="457200" indent="-228600">
-              <a:buFont typeface="Calibri"/>
-              <a:spcAft>
-                <a:spcPts val="1000"/>
-              </a:spcAft>
-              <a:buSzPct val="100000"/>
-              <a:buChar char="•"/>
-              <a:lnSpc>
-                <a:spcPts val="2200"/>
-              </a:lnSpc>
-            </a:pPr>
-            <a:r>
-              <a:rPr sz="2000" b="0">
-                <a:solidFill>
-                  <a:srgbClr val="333333"/>
-                </a:solidFill>
-                <a:latin typeface="Calibri"/>
-              </a:rPr>
-              <a:t>In the browser lab track, open the </a:t>
-            </a:r>
-            <a:r>
-              <a:rPr sz="2000" b="1">
-                <a:solidFill>
-                  <a:srgbClr val="333333"/>
-                </a:solidFill>
-                <a:latin typeface="Calibri"/>
-              </a:rPr>
-              <a:t>kl-partition</a:t>
-            </a:r>
-            <a:r>
-              <a:rPr sz="2000" b="0">
-                <a:solidFill>
-                  <a:srgbClr val="333333"/>
-                </a:solidFill>
-                <a:latin typeface="Calibri"/>
-              </a:rPr>
-              <a:t> lab from the tools shelf</a:t>
-            </a:r>
-          </a:p>
-          <a:p>
-            <a:pPr lvl="0" marL="457200" indent="-228600">
-              <a:buFont typeface="Calibri"/>
-              <a:spcAft>
-                <a:spcPts val="1000"/>
-              </a:spcAft>
-              <a:buSzPct val="100000"/>
-              <a:buChar char="•"/>
-              <a:lnSpc>
-                <a:spcPts val="2200"/>
-              </a:lnSpc>
-            </a:pPr>
-            <a:r>
-              <a:rPr sz="2000" b="0">
-                <a:solidFill>
-                  <a:srgbClr val="333333"/>
-                </a:solidFill>
-                <a:latin typeface="Calibri"/>
-              </a:rPr>
-              <a:t>Load the starter graph, run the algorithm once</a:t>
-            </a:r>
-          </a:p>
-          <a:p>
-            <a:pPr lvl="0" marL="457200" indent="-228600">
-              <a:buFont typeface="Calibri"/>
-              <a:spcAft>
-                <a:spcPts val="1000"/>
-              </a:spcAft>
-              <a:buSzPct val="100000"/>
-              <a:buChar char="•"/>
-              <a:lnSpc>
-                <a:spcPts val="2200"/>
-              </a:lnSpc>
-            </a:pPr>
-            <a:r>
-              <a:rPr sz="2000" b="0">
-                <a:solidFill>
-                  <a:srgbClr val="333333"/>
-                </a:solidFill>
-                <a:latin typeface="Calibri"/>
-              </a:rPr>
-              <a:t>Work the challenges that lock the goldens</a:t>
-            </a:r>
-          </a:p>
-        </p:txBody>
-      </p:sp>
-      <p:sp>
-        <p:nvSpPr>
-          <p:cNvPr id="4" name="TextBox 3"/>
-          <p:cNvSpPr txBox="1"/>
-          <p:nvPr/>
-        </p:nvSpPr>
-        <p:spPr>
-          <a:xfrm>
-            <a:off x="548640" y="6355080"/>
-            <a:ext cx="11064240" cy="320040"/>
-          </a:xfrm>
-          <a:prstGeom prst="rect">
-            <a:avLst/>
-          </a:prstGeom>
-          <a:noFill/>
-        </p:spPr>
-        <p:txBody>
-          <a:bodyPr wrap="square">
-            <a:noAutofit/>
-          </a:bodyPr>
-          <a:lstStyle/>
-          <a:p>
-            <a:pPr algn="r">
-              <a:lnSpc>
-                <a:spcPts val="2200"/>
-              </a:lnSpc>
-              <a:defRPr sz="1000" b="0">
-                <a:solidFill>
-                  <a:srgbClr val="666666"/>
-                </a:solidFill>
-                <a:latin typeface="Calibri"/>
-              </a:defRPr>
-            </a:pPr>
-            <a:r>
-              <a:t>learn_partitioning — 01 kl partition</a:t>
-            </a:r>
-          </a:p>
-        </p:txBody>
-      </p:sp>
-    </p:spTree>
-  </p:cSld>
-  <p:clrMapOvr>
-    <a:masterClrMapping/>
-  </p:clrMapOvr>
-</p:sld>
-</file>
-
-<file path=ppt/slides/slide9.xml><?xml version="1.0" encoding="utf-8"?>
-<p:sld xmlns:a="http://schemas.openxmlformats.org/drawingml/2006/main" xmlns:p="http://schemas.openxmlformats.org/presentationml/2006/main" xmlns:r="http://schemas.openxmlformats.org/officeDocument/2006/relationships">
-  <p:cSld>
-    <p:spTree>
-      <p:nvGrpSpPr>
-        <p:cNvPr id="1" name=""/>
-        <p:cNvGrpSpPr/>
-        <p:nvPr/>
-      </p:nvGrpSpPr>
-      <p:grpSpPr/>
-      <p:sp>
-        <p:nvSpPr>
-          <p:cNvPr id="2" name="TextBox 1"/>
-          <p:cNvSpPr txBox="1"/>
-          <p:nvPr/>
-        </p:nvSpPr>
-        <p:spPr>
-          <a:xfrm>
-            <a:off x="548640" y="411480"/>
-            <a:ext cx="11064240" cy="777240"/>
-          </a:xfrm>
-          <a:prstGeom prst="rect">
-            <a:avLst/>
-          </a:prstGeom>
-          <a:noFill/>
-        </p:spPr>
-        <p:txBody>
-          <a:bodyPr wrap="square">
-            <a:noAutofit/>
-          </a:bodyPr>
-          <a:lstStyle/>
-          <a:p>
-            <a:pPr>
-              <a:lnSpc>
-                <a:spcPts val="2200"/>
-              </a:lnSpc>
-            </a:pPr>
-            <a:r>
-              <a:rPr sz="2800" b="1">
-                <a:solidFill>
-                  <a:srgbClr val="1A1A2E"/>
-                </a:solidFill>
-                <a:latin typeface="Calibri"/>
-              </a:rPr>
-              <a:t>Implement track</a:t>
-            </a:r>
-          </a:p>
-        </p:txBody>
-      </p:sp>
-      <p:sp>
-        <p:nvSpPr>
-          <p:cNvPr id="3" name="TextBox 2"/>
-          <p:cNvSpPr txBox="1"/>
-          <p:nvPr/>
-        </p:nvSpPr>
-        <p:spPr>
-          <a:xfrm>
-            <a:off x="548640" y="1234440"/>
-            <a:ext cx="11064240" cy="4937760"/>
-          </a:xfrm>
-          <a:prstGeom prst="rect">
-            <a:avLst/>
-          </a:prstGeom>
-          <a:noFill/>
-        </p:spPr>
-        <p:txBody>
-          <a:bodyPr wrap="square">
-            <a:noAutofit/>
-          </a:bodyPr>
-          <a:lstStyle/>
-          <a:p>
-            <a:pPr lvl="0" marL="457200" indent="-228600">
-              <a:buFont typeface="Calibri"/>
-              <a:spcAft>
-                <a:spcPts val="1000"/>
-              </a:spcAft>
-              <a:buSzPct val="100000"/>
-              <a:buChar char="•"/>
-              <a:lnSpc>
-                <a:spcPts val="2200"/>
-              </a:lnSpc>
-            </a:pPr>
-            <a:r>
-              <a:rPr sz="2000" b="0">
-                <a:solidFill>
-                  <a:srgbClr val="333333"/>
-                </a:solidFill>
-                <a:latin typeface="Calibri"/>
-              </a:rPr>
-              <a:t>In the implement track, open this module’s examples and the course `common/` solvers</a:t>
-            </a:r>
-          </a:p>
-          <a:p>
-            <a:pPr lvl="0" marL="457200" indent="-228600">
-              <a:buFont typeface="Calibri"/>
-              <a:spcAft>
-                <a:spcPts val="1000"/>
-              </a:spcAft>
-              <a:buSzPct val="100000"/>
-              <a:buChar char="•"/>
-              <a:lnSpc>
-                <a:spcPts val="2200"/>
-              </a:lnSpc>
-            </a:pPr>
-            <a:r>
-              <a:rPr sz="2000" b="0">
-                <a:solidFill>
-                  <a:srgbClr val="333333"/>
-                </a:solidFill>
-                <a:latin typeface="Calibri"/>
-              </a:rPr>
-              <a:t>Parse the tiny graph, run the algorithm with a deterministic seed</a:t>
-            </a:r>
-          </a:p>
-          <a:p>
-            <a:pPr lvl="0" marL="457200" indent="-228600">
-              <a:buFont typeface="Calibri"/>
-              <a:spcAft>
-                <a:spcPts val="1000"/>
-              </a:spcAft>
-              <a:buSzPct val="100000"/>
-              <a:buChar char="•"/>
-              <a:lnSpc>
-                <a:spcPts val="2200"/>
-              </a:lnSpc>
-            </a:pPr>
-            <a:r>
-              <a:rPr sz="2000" b="0">
-                <a:solidFill>
-                  <a:srgbClr val="333333"/>
-                </a:solidFill>
-                <a:latin typeface="Calibri"/>
-              </a:rPr>
-              <a:t>Match the browser goldens before you claim the checklist</a:t>
-            </a:r>
-          </a:p>
-        </p:txBody>
-      </p:sp>
-      <p:sp>
-        <p:nvSpPr>
-          <p:cNvPr id="4" name="TextBox 3"/>
           <p:cNvSpPr txBox="1"/>
           <p:nvPr/>
         </p:nvSpPr>
